--- a/Schools_ML_Track/camp_2026/slides/ML/ML24.pptx
+++ b/Schools_ML_Track/camp_2026/slides/ML/ML24.pptx
@@ -126,7 +126,7 @@
   <p:extLst>
     <p:ext uri="{521415D9-36F7-43E2-AB2F-B90AF26B5E84}">
       <p14:sectionLst xmlns:p14="http://schemas.microsoft.com/office/powerpoint/2010/main">
-        <p14:section name="Opening" id="{e618c1ac-a6c8-d92d-1942-accd4913d3ab}">
+        <p14:section name="Opening" id="{784182ce-25e1-1fa6-603f-28d3be844a5b}">
           <p14:sldIdLst>
             <p14:sldId id="256"/>
             <p14:sldId id="257"/>
@@ -137,7 +137,7 @@
             <p14:sldId id="262"/>
           </p14:sldIdLst>
         </p14:section>
-        <p14:section name="Block A" id="{6296e0e9-3151-f963-a849-6db9f5e6aa53}">
+        <p14:section name="Block A" id="{0aaa441e-491a-534d-6c1b-0512c24ed3ab}">
           <p14:sldIdLst>
             <p14:sldId id="263"/>
             <p14:sldId id="264"/>
@@ -146,15 +146,15 @@
             <p14:sldId id="268"/>
           </p14:sldIdLst>
         </p14:section>
-        <p14:section name="Break" id="{79098741-0815-a606-8c25-4071a39ef91c}">
+        <p14:section name="Break" id="{d6575560-5ce6-7c92-8fec-5f2a2c11154d}">
           <p14:sldIdLst>
             <p14:sldId id="267"/>
           </p14:sldIdLst>
         </p14:section>
-        <p14:section name="Block A" id="{5f6d17e5-2944-8009-676b-f49692b72d56}">
+        <p14:section name="Block A" id="{c2e81831-31c1-a3b9-3b5b-654bb0353def}">
           <p14:sldIdLst/>
         </p14:section>
-        <p14:section name="Block B" id="{2fe56988-d5d4-76c2-c8d4-a4d03c443890}">
+        <p14:section name="Block B" id="{b8fd7460-6ff3-5187-c70d-ea0a98950e5e}">
           <p14:sldIdLst>
             <p14:sldId id="269"/>
             <p14:sldId id="270"/>
@@ -162,7 +162,7 @@
             <p14:sldId id="272"/>
           </p14:sldIdLst>
         </p14:section>
-        <p14:section name="Make and close" id="{eaca28d3-11bb-d4b2-2067-2446204ba240}">
+        <p14:section name="Make and close" id="{d3388e65-1658-da62-aa79-406020974573}">
           <p14:sldIdLst>
             <p14:sldId id="273"/>
             <p14:sldId id="274"/>

--- a/Schools_ML_Track/camp_2026/slides/ML/ML24.pptx
+++ b/Schools_ML_Track/camp_2026/slides/ML/ML24.pptx
@@ -126,7 +126,7 @@
   <p:extLst>
     <p:ext uri="{521415D9-36F7-43E2-AB2F-B90AF26B5E84}">
       <p14:sectionLst xmlns:p14="http://schemas.microsoft.com/office/powerpoint/2010/main">
-        <p14:section name="Opening" id="{784182ce-25e1-1fa6-603f-28d3be844a5b}">
+        <p14:section name="Opening" id="{7ccc00a8-ad6d-68e4-419f-4ebc4ee458b5}">
           <p14:sldIdLst>
             <p14:sldId id="256"/>
             <p14:sldId id="257"/>
@@ -137,7 +137,7 @@
             <p14:sldId id="262"/>
           </p14:sldIdLst>
         </p14:section>
-        <p14:section name="Block A" id="{0aaa441e-491a-534d-6c1b-0512c24ed3ab}">
+        <p14:section name="Block A" id="{3ac21f01-7ec0-9abb-7049-0d45a1f6a4db}">
           <p14:sldIdLst>
             <p14:sldId id="263"/>
             <p14:sldId id="264"/>
@@ -146,15 +146,15 @@
             <p14:sldId id="268"/>
           </p14:sldIdLst>
         </p14:section>
-        <p14:section name="Break" id="{d6575560-5ce6-7c92-8fec-5f2a2c11154d}">
+        <p14:section name="Break" id="{3e1b13b5-b512-af96-279a-d2ae6d548189}">
           <p14:sldIdLst>
             <p14:sldId id="267"/>
           </p14:sldIdLst>
         </p14:section>
-        <p14:section name="Block A" id="{c2e81831-31c1-a3b9-3b5b-654bb0353def}">
+        <p14:section name="Block A" id="{5f19bca1-9a44-f50b-b113-b93b4f1c7530}">
           <p14:sldIdLst/>
         </p14:section>
-        <p14:section name="Block B" id="{b8fd7460-6ff3-5187-c70d-ea0a98950e5e}">
+        <p14:section name="Block B" id="{99fb417a-6658-fae9-ca84-4bf285d0f233}">
           <p14:sldIdLst>
             <p14:sldId id="269"/>
             <p14:sldId id="270"/>
@@ -162,7 +162,7 @@
             <p14:sldId id="272"/>
           </p14:sldIdLst>
         </p14:section>
-        <p14:section name="Make and close" id="{d3388e65-1658-da62-aa79-406020974573}">
+        <p14:section name="Make and close" id="{c295d4fd-393c-9032-b095-02ca4e1bef0e}">
           <p14:sldIdLst>
             <p14:sldId id="273"/>
             <p14:sldId id="274"/>
@@ -3015,7 +3015,24 @@
                 <a:ea typeface="Lato" pitchFamily="34" charset="-122"/>
                 <a:cs typeface="Lato" pitchFamily="34" charset="-120"/>
               </a:rPr>
-              <a:t>Parent showcase and next steps</a:t>
+              <a:t>Parent showcase</a:t>
+            </a:r>
+            <a:endParaRPr lang="en-US" sz="5600" dirty="0"/>
+          </a:p>
+          <a:p>
+            <a:pPr algn="l" indent="0" marL="0">
+              <a:buNone/>
+            </a:pPr>
+            <a:r>
+              <a:rPr lang="en-US" sz="5600" b="1" dirty="0">
+                <a:solidFill>
+                  <a:srgbClr val="FFFFFF"/>
+                </a:solidFill>
+                <a:latin typeface="Lato" pitchFamily="34" charset="0"/>
+                <a:ea typeface="Lato" pitchFamily="34" charset="-122"/>
+                <a:cs typeface="Lato" pitchFamily="34" charset="-120"/>
+              </a:rPr>
+              <a:t>and next steps</a:t>
             </a:r>
             <a:endParaRPr lang="en-US" sz="5600" dirty="0"/>
           </a:p>
@@ -4893,15 +4910,15 @@
           <a:p>
             <a:pPr algn="l" indent="0" marL="0">
               <a:lnSpc>
-                <a:spcPts val="3600"/>
+                <a:spcPts val="3360"/>
               </a:lnSpc>
               <a:spcAft>
-                <a:spcPts val="2520"/>
+                <a:spcPts val="2020"/>
               </a:spcAft>
               <a:buNone/>
             </a:pPr>
             <a:r>
-              <a:rPr lang="en-US" sz="3000" dirty="0">
+              <a:rPr lang="en-US" sz="2800" dirty="0">
                 <a:solidFill>
                   <a:srgbClr val="111111"/>
                 </a:solidFill>
@@ -4909,22 +4926,45 @@
                 <a:ea typeface="Lato" pitchFamily="34" charset="-122"/>
                 <a:cs typeface="Lato" pitchFamily="34" charset="-120"/>
               </a:rPr>
-              <a:t>Present your project, say who helped you, and choose one next learning goal. Keep your project folder and feedback after the camp.</a:t>
-            </a:r>
-            <a:endParaRPr lang="en-US" sz="3000" dirty="0"/>
+              <a:t>Present your project, say who helped you, and choose one next learning goal.</a:t>
+            </a:r>
+            <a:endParaRPr lang="en-US" sz="2800" dirty="0"/>
           </a:p>
           <a:p>
             <a:pPr algn="l" indent="0" marL="0">
               <a:lnSpc>
-                <a:spcPts val="3600"/>
+                <a:spcPts val="3360"/>
               </a:lnSpc>
               <a:spcAft>
-                <a:spcPts val="2520"/>
+                <a:spcPts val="2020"/>
               </a:spcAft>
               <a:buNone/>
             </a:pPr>
             <a:r>
-              <a:rPr lang="en-US" sz="3000" dirty="0">
+              <a:rPr lang="en-US" sz="2800" dirty="0">
+                <a:solidFill>
+                  <a:srgbClr val="111111"/>
+                </a:solidFill>
+                <a:latin typeface="Lato" pitchFamily="34" charset="0"/>
+                <a:ea typeface="Lato" pitchFamily="34" charset="-122"/>
+                <a:cs typeface="Lato" pitchFamily="34" charset="-120"/>
+              </a:rPr>
+              <a:t>Keep your project folder and feedback after the camp.</a:t>
+            </a:r>
+            <a:endParaRPr lang="en-US" sz="2800" dirty="0"/>
+          </a:p>
+          <a:p>
+            <a:pPr algn="l" indent="0" marL="0">
+              <a:lnSpc>
+                <a:spcPts val="3360"/>
+              </a:lnSpc>
+              <a:spcAft>
+                <a:spcPts val="2020"/>
+              </a:spcAft>
+              <a:buNone/>
+            </a:pPr>
+            <a:r>
+              <a:rPr lang="en-US" sz="2800" dirty="0">
                 <a:solidFill>
                   <a:srgbClr val="111111"/>
                 </a:solidFill>
@@ -4934,7 +4974,7 @@
               </a:rPr>
               <a:t>Save it as ML24. Write two sentences: what you changed and how you checked it.</a:t>
             </a:r>
-            <a:endParaRPr lang="en-US" sz="3000" dirty="0"/>
+            <a:endParaRPr lang="en-US" sz="2800" dirty="0"/>
           </a:p>
         </p:txBody>
       </p:sp>
